--- a/urok20/Урок20_презентация.pptx
+++ b/urok20/Урок20_презентация.pptx
@@ -10,6 +10,7 @@
     <p:sldId id="258" r:id="rId4"/>
     <p:sldId id="259" r:id="rId5"/>
     <p:sldId id="260" r:id="rId6"/>
+    <p:sldId id="262" r:id="rId13"/>
     <p:sldId id="261" r:id="rId7"/>
   </p:sldIdLst>
   <p:notesMasterIdLst>
@@ -1974,6 +1975,81 @@
           </a:p>
         </p:txBody>
       </p:sp>
+      <p:sp>
+        <p:nvSpPr>
+          <p:cNvPr id="0" name="card"/>
+          <p:cNvSpPr/>
+          <p:nvPr/>
+        </p:nvSpPr>
+        <p:spPr>
+          <a:xfrm>
+            <a:off x="594360" y="5480000"/>
+            <a:ext cx="11002975" cy="760000"/>
+          </a:xfrm>
+          <a:prstGeom prst="roundRect">
+            <a:avLst>
+              <a:gd name="adj" fmla="val 3333"/>
+            </a:avLst>
+          </a:prstGeom>
+          <a:solidFill>
+            <a:srgbClr val="2C2552"/>
+          </a:solidFill>
+          <a:ln/>
+        </p:spPr>
+      </p:sp>
+      <p:sp>
+        <p:nvSpPr>
+          <p:cNvPr id="0" name="tb"/>
+          <p:cNvSpPr/>
+          <p:nvPr/>
+        </p:nvSpPr>
+        <p:spPr>
+          <a:xfrm>
+            <a:off x="900000" y="5555000"/>
+            <a:ext cx="10400000" cy="640000"/>
+          </a:xfrm>
+          <a:prstGeom prst="rect">
+            <a:avLst/>
+          </a:prstGeom>
+          <a:noFill/>
+          <a:ln/>
+        </p:spPr>
+        <p:txBody>
+          <a:bodyPr wrap="square" rtlCol="0" anchor="t"/>
+          <a:lstStyle/>
+          <a:p>
+            <a:pPr indent="0" marL="0">
+              <a:buNone/>
+            </a:pPr>
+            <a:r>
+              <a:rPr lang="ru-RU" sz="1100" b="1" dirty="0">
+                <a:solidFill>
+                  <a:srgbClr val="27D3EE"/>
+                </a:solidFill>
+                <a:latin typeface="Calibri" pitchFamily="34" charset="0"/>
+              </a:rPr>
+              <a:t>АНАЛОГИЯ · ЛИЧНАЯ СТРАНИЦА В СОЦСЕТИ</a:t>
+            </a:r>
+          </a:p>
+          <a:p>
+            <a:pPr indent="0" marL="0">
+              <a:lnSpc>
+                <a:spcPct val="118000"/>
+              </a:lnSpc>
+              <a:buNone/>
+            </a:pPr>
+            <a:r>
+              <a:rPr lang="ru-RU" sz="1500" dirty="0">
+                <a:solidFill>
+                  <a:srgbClr val="D9D4F2"/>
+                </a:solidFill>
+                <a:latin typeface="Calibri" pitchFamily="34" charset="0"/>
+              </a:rPr>
+              <a:t>Постоянная ссылка — как твоя страница в соцсети: есть адрес, куда можно зайти в любой момент и показать друзьям. Временная так не умеет.</a:t>
+            </a:r>
+          </a:p>
+        </p:txBody>
+      </p:sp>
     </p:spTree>
   </p:cSld>
   <p:clrMapOvr>
@@ -2471,7 +2547,7 @@
         <p:spPr>
           <a:xfrm>
             <a:off x="594360" y="4480560"/>
-            <a:ext cx="11002975" cy="822960"/>
+            <a:ext cx="11002975" cy="320040"/>
           </a:xfrm>
           <a:prstGeom prst="rect">
             <a:avLst/>
@@ -2495,7 +2571,7 @@
                 <a:ea typeface="Consolas" pitchFamily="34" charset="-122"/>
                 <a:cs typeface="Consolas" pitchFamily="34" charset="-120"/>
               </a:rPr>
-              <a:t>gr.Interface(fn=…, inputs=…, outputs=…) — и Gradio сам строит веб-страницу.</a:t>
+              <a:t>gr.Interface — и Gradio сам строит веб-страницу. Готовый код:</a:t>
             </a:r>
             <a:endParaRPr lang="en-US" sz="1800" dirty="0"/>
           </a:p>
@@ -2537,6 +2613,164 @@
               <a:t>Урок 20</a:t>
             </a:r>
             <a:endParaRPr lang="en-US" sz="1100" dirty="0"/>
+          </a:p>
+        </p:txBody>
+      </p:sp>
+      <p:sp>
+        <p:nvSpPr>
+          <p:cNvPr id="0" name="card"/>
+          <p:cNvSpPr/>
+          <p:nvPr/>
+        </p:nvSpPr>
+        <p:spPr>
+          <a:xfrm>
+            <a:off x="594360" y="4920000"/>
+            <a:ext cx="11002975" cy="1360000"/>
+          </a:xfrm>
+          <a:prstGeom prst="roundRect">
+            <a:avLst>
+              <a:gd name="adj" fmla="val 3333"/>
+            </a:avLst>
+          </a:prstGeom>
+          <a:solidFill>
+            <a:srgbClr val="14102E"/>
+          </a:solidFill>
+          <a:ln/>
+        </p:spPr>
+      </p:sp>
+      <p:sp>
+        <p:nvSpPr>
+          <p:cNvPr id="0" name="tb"/>
+          <p:cNvSpPr/>
+          <p:nvPr/>
+        </p:nvSpPr>
+        <p:spPr>
+          <a:xfrm>
+            <a:off x="900000" y="5030000"/>
+            <a:ext cx="10400000" cy="1250000"/>
+          </a:xfrm>
+          <a:prstGeom prst="rect">
+            <a:avLst/>
+          </a:prstGeom>
+          <a:noFill/>
+          <a:ln/>
+        </p:spPr>
+        <p:txBody>
+          <a:bodyPr wrap="square" rtlCol="0" anchor="t"/>
+          <a:lstStyle/>
+          <a:p>
+            <a:pPr indent="0" marL="0">
+              <a:lnSpc>
+                <a:spcPct val="118000"/>
+              </a:lnSpc>
+              <a:buNone/>
+            </a:pPr>
+            <a:r>
+              <a:rPr lang="en-US" sz="1300" dirty="0">
+                <a:solidFill>
+                  <a:srgbClr val="D9D4F2"/>
+                </a:solidFill>
+                <a:latin typeface="Consolas" pitchFamily="34" charset="0"/>
+                <a:ea typeface="Consolas" pitchFamily="34" charset="-122"/>
+                <a:cs typeface="Consolas" pitchFamily="34" charset="-120"/>
+              </a:rPr>
+              <a:t>import gradio as gr</a:t>
+            </a:r>
+          </a:p>
+          <a:p>
+            <a:pPr indent="0" marL="0">
+              <a:lnSpc>
+                <a:spcPct val="118000"/>
+              </a:lnSpc>
+              <a:buNone/>
+            </a:pPr>
+            <a:r>
+              <a:rPr lang="en-US" sz="1300" dirty="0">
+                <a:solidFill>
+                  <a:srgbClr val="D9D4F2"/>
+                </a:solidFill>
+                <a:latin typeface="Consolas" pitchFamily="34" charset="0"/>
+                <a:ea typeface="Consolas" pitchFamily="34" charset="-122"/>
+                <a:cs typeface="Consolas" pitchFamily="34" charset="-120"/>
+              </a:rPr>
+              <a:t>gr.Interface(</a:t>
+            </a:r>
+          </a:p>
+          <a:p>
+            <a:pPr indent="0" marL="0">
+              <a:lnSpc>
+                <a:spcPct val="118000"/>
+              </a:lnSpc>
+              <a:buNone/>
+            </a:pPr>
+            <a:r>
+              <a:rPr lang="en-US" sz="1300" dirty="0">
+                <a:solidFill>
+                  <a:srgbClr val="D9D4F2"/>
+                </a:solidFill>
+                <a:latin typeface="Consolas" pitchFamily="34" charset="0"/>
+                <a:ea typeface="Consolas" pitchFamily="34" charset="-122"/>
+                <a:cs typeface="Consolas" pitchFamily="34" charset="-120"/>
+              </a:rPr>
+              <a:t>    fn=predict,          # функция-модель</a:t>
+            </a:r>
+          </a:p>
+          <a:p>
+            <a:pPr indent="0" marL="0">
+              <a:lnSpc>
+                <a:spcPct val="118000"/>
+              </a:lnSpc>
+              <a:buNone/>
+            </a:pPr>
+            <a:r>
+              <a:rPr lang="en-US" sz="1300" dirty="0">
+                <a:solidFill>
+                  <a:srgbClr val="D9D4F2"/>
+                </a:solidFill>
+                <a:latin typeface="Consolas" pitchFamily="34" charset="0"/>
+                <a:ea typeface="Consolas" pitchFamily="34" charset="-122"/>
+                <a:cs typeface="Consolas" pitchFamily="34" charset="-120"/>
+              </a:rPr>
+              <a:t>    inputs=gr.Number(),  # что вводит пользователь</a:t>
+            </a:r>
+          </a:p>
+          <a:p>
+            <a:pPr indent="0" marL="0">
+              <a:lnSpc>
+                <a:spcPct val="118000"/>
+              </a:lnSpc>
+              <a:buNone/>
+            </a:pPr>
+            <a:r>
+              <a:rPr lang="en-US" sz="1300" dirty="0">
+                <a:solidFill>
+                  <a:srgbClr val="D9D4F2"/>
+                </a:solidFill>
+                <a:latin typeface="Consolas" pitchFamily="34" charset="0"/>
+                <a:ea typeface="Consolas" pitchFamily="34" charset="-122"/>
+                <a:cs typeface="Consolas" pitchFamily="34" charset="-120"/>
+              </a:rPr>
+              <a:t>    outputs=gr.Label()   # что показываем</a:t>
+            </a:r>
+          </a:p>
+          <a:p>
+            <a:pPr indent="0" marL="0">
+              <a:lnSpc>
+                <a:spcPct val="118000"/>
+              </a:lnSpc>
+              <a:buNone/>
+            </a:pPr>
+            <a:r>
+              <a:rPr lang="en-US" sz="1300" dirty="0">
+                <a:solidFill>
+                  <a:srgbClr val="D9D4F2"/>
+                </a:solidFill>
+                <a:latin typeface="Consolas" pitchFamily="34" charset="0"/>
+                <a:ea typeface="Consolas" pitchFamily="34" charset="-122"/>
+                <a:cs typeface="Consolas" pitchFamily="34" charset="-120"/>
+              </a:rPr>
+              <a:t>).launch()</a:t>
+            </a:r>
           </a:p>
         </p:txBody>
       </p:sp>
@@ -4385,6 +4619,680 @@
       <p:sp>
         <p:nvSpPr>
           <p:cNvPr id="12" name="Text 10"/>
+          <p:cNvSpPr/>
+          <p:nvPr/>
+        </p:nvSpPr>
+        <p:spPr>
+          <a:xfrm>
+            <a:off x="10271455" y="6355080"/>
+            <a:ext cx="1371600" cy="274320"/>
+          </a:xfrm>
+          <a:prstGeom prst="rect">
+            <a:avLst/>
+          </a:prstGeom>
+          <a:noFill/>
+          <a:ln/>
+        </p:spPr>
+        <p:txBody>
+          <a:bodyPr wrap="square" rtlCol="0" anchor="t"/>
+          <a:lstStyle/>
+          <a:p>
+            <a:pPr algn="r" indent="0" marL="0">
+              <a:buNone/>
+            </a:pPr>
+            <a:r>
+              <a:rPr lang="en-US" sz="1100" dirty="0">
+                <a:solidFill>
+                  <a:srgbClr val="9E96C8"/>
+                </a:solidFill>
+                <a:latin typeface="Calibri" pitchFamily="34" charset="0"/>
+                <a:ea typeface="Calibri" pitchFamily="34" charset="-122"/>
+                <a:cs typeface="Calibri" pitchFamily="34" charset="-120"/>
+              </a:rPr>
+              <a:t>Урок 20</a:t>
+            </a:r>
+            <a:endParaRPr lang="en-US" sz="1100" dirty="0"/>
+          </a:p>
+        </p:txBody>
+      </p:sp>
+    </p:spTree>
+  </p:cSld>
+  <p:clrMapOvr>
+    <a:masterClrMapping/>
+  </p:clrMapOvr>
+</p:sld>
+</file>
+
+<file path=ppt/slides/slide7.xml><?xml version="1.0" encoding="utf-8"?>
+<p:sld xmlns:a="http://schemas.openxmlformats.org/drawingml/2006/main" xmlns:r="http://schemas.openxmlformats.org/officeDocument/2006/relationships" xmlns:p="http://schemas.openxmlformats.org/presentationml/2006/main">
+  <p:cSld name="Slide 4">
+    <p:bg>
+      <p:bgPr>
+        <a:solidFill>
+          <a:srgbClr val="17132E"/>
+        </a:solidFill>
+      </p:bgPr>
+    </p:bg>
+    <p:spTree>
+      <p:nvGrpSpPr>
+        <p:cNvPr id="1" name=""/>
+        <p:cNvGrpSpPr/>
+        <p:nvPr/>
+      </p:nvGrpSpPr>
+      <p:grpSpPr>
+        <a:xfrm>
+          <a:off x="0" y="0"/>
+          <a:ext cx="0" cy="0"/>
+          <a:chOff x="0" y="0"/>
+          <a:chExt cx="0" cy="0"/>
+        </a:xfrm>
+      </p:grpSpPr>
+      <p:sp>
+        <p:nvSpPr>
+          <p:cNvPr id="2" name="Text 0"/>
+          <p:cNvSpPr/>
+          <p:nvPr/>
+        </p:nvSpPr>
+        <p:spPr>
+          <a:xfrm>
+            <a:off x="594360" y="457200"/>
+            <a:ext cx="11002975" cy="320040"/>
+          </a:xfrm>
+          <a:prstGeom prst="rect">
+            <a:avLst/>
+          </a:prstGeom>
+          <a:noFill/>
+          <a:ln/>
+        </p:spPr>
+        <p:txBody>
+          <a:bodyPr wrap="square" rtlCol="0" anchor="t"/>
+          <a:lstStyle/>
+          <a:p>
+            <a:pPr indent="0" marL="0">
+              <a:buNone/>
+            </a:pPr>
+            <a:r>
+              <a:rPr lang="en-US" sz="1300" b="1" spc="200" kern="0" dirty="0">
+                <a:solidFill>
+                  <a:srgbClr val="27D3EE"/>
+                </a:solidFill>
+                <a:latin typeface="Calibri" pitchFamily="34" charset="0"/>
+                <a:ea typeface="Calibri" pitchFamily="34" charset="-122"/>
+                <a:cs typeface="Calibri" pitchFamily="34" charset="-120"/>
+              </a:rPr>
+              <a:t>ЧАСТЫЕ ОШИБКИ</a:t>
+            </a:r>
+            <a:endParaRPr lang="en-US" sz="1300" dirty="0"/>
+          </a:p>
+        </p:txBody>
+      </p:sp>
+      <p:sp>
+        <p:nvSpPr>
+          <p:cNvPr id="3" name="Text 1"/>
+          <p:cNvSpPr/>
+          <p:nvPr/>
+        </p:nvSpPr>
+        <p:spPr>
+          <a:xfrm>
+            <a:off x="594360" y="749808"/>
+            <a:ext cx="11002975" cy="822960"/>
+          </a:xfrm>
+          <a:prstGeom prst="rect">
+            <a:avLst/>
+          </a:prstGeom>
+          <a:noFill/>
+          <a:ln/>
+        </p:spPr>
+        <p:txBody>
+          <a:bodyPr wrap="square" rtlCol="0" anchor="t"/>
+          <a:lstStyle/>
+          <a:p>
+            <a:pPr indent="0" marL="0">
+              <a:buNone/>
+            </a:pPr>
+            <a:r>
+              <a:rPr lang="en-US" sz="3000" b="1" dirty="0">
+                <a:solidFill>
+                  <a:srgbClr val="FFFFFF"/>
+                </a:solidFill>
+                <a:latin typeface="Calibri" pitchFamily="34" charset="0"/>
+                <a:ea typeface="Calibri" pitchFamily="34" charset="-122"/>
+                <a:cs typeface="Calibri" pitchFamily="34" charset="-120"/>
+              </a:rPr>
+              <a:t>3 частые ошибки — и как избежать</a:t>
+            </a:r>
+            <a:endParaRPr lang="en-US" sz="3000" dirty="0"/>
+          </a:p>
+        </p:txBody>
+      </p:sp>
+      <p:sp>
+        <p:nvSpPr>
+          <p:cNvPr id="4" name="Shape 2"/>
+          <p:cNvSpPr/>
+          <p:nvPr/>
+        </p:nvSpPr>
+        <p:spPr>
+          <a:xfrm>
+            <a:off x="594360" y="2194560"/>
+            <a:ext cx="3362858" cy="3108960"/>
+          </a:xfrm>
+          <a:prstGeom prst="roundRect">
+            <a:avLst>
+              <a:gd name="adj" fmla="val 3529"/>
+            </a:avLst>
+          </a:prstGeom>
+          <a:solidFill>
+            <a:srgbClr val="241E42"/>
+          </a:solidFill>
+          <a:ln/>
+        </p:spPr>
+      </p:sp>
+      <p:sp>
+        <p:nvSpPr>
+          <p:cNvPr id="5" name="Shape 3"/>
+          <p:cNvSpPr/>
+          <p:nvPr/>
+        </p:nvSpPr>
+        <p:spPr>
+          <a:xfrm>
+            <a:off x="1910029" y="2514600"/>
+            <a:ext cx="731520" cy="731520"/>
+          </a:xfrm>
+          <a:prstGeom prst="ellipse">
+            <a:avLst/>
+          </a:prstGeom>
+          <a:solidFill>
+            <a:srgbClr val="5B4FC4"/>
+          </a:solidFill>
+          <a:ln/>
+        </p:spPr>
+      </p:sp>
+      <p:sp>
+        <p:nvSpPr>
+          <p:cNvPr id="6" name="Text 4"/>
+          <p:cNvSpPr/>
+          <p:nvPr/>
+        </p:nvSpPr>
+        <p:spPr>
+          <a:xfrm>
+            <a:off x="1910029" y="2514600"/>
+            <a:ext cx="731520" cy="731520"/>
+          </a:xfrm>
+          <a:prstGeom prst="rect">
+            <a:avLst/>
+          </a:prstGeom>
+          <a:noFill/>
+          <a:ln/>
+        </p:spPr>
+        <p:txBody>
+          <a:bodyPr wrap="square" rtlCol="0" anchor="ctr"/>
+          <a:lstStyle/>
+          <a:p>
+            <a:pPr algn="ctr" indent="0" marL="0">
+              <a:buNone/>
+            </a:pPr>
+            <a:r>
+              <a:rPr lang="en-US" sz="2400" b="1" dirty="0">
+                <a:solidFill>
+                  <a:srgbClr val="FFFFFF"/>
+                </a:solidFill>
+                <a:latin typeface="Calibri" pitchFamily="34" charset="0"/>
+                <a:ea typeface="Calibri" pitchFamily="34" charset="-122"/>
+                <a:cs typeface="Calibri" pitchFamily="34" charset="-120"/>
+              </a:rPr>
+              <a:t>1</a:t>
+            </a:r>
+            <a:endParaRPr lang="en-US" sz="2400" dirty="0"/>
+          </a:p>
+        </p:txBody>
+      </p:sp>
+      <p:sp>
+        <p:nvSpPr>
+          <p:cNvPr id="7" name="Text 5"/>
+          <p:cNvSpPr/>
+          <p:nvPr/>
+        </p:nvSpPr>
+        <p:spPr>
+          <a:xfrm>
+            <a:off x="731520" y="3474720"/>
+            <a:ext cx="3088538" cy="548640"/>
+          </a:xfrm>
+          <a:prstGeom prst="rect">
+            <a:avLst/>
+          </a:prstGeom>
+          <a:noFill/>
+          <a:ln/>
+        </p:spPr>
+        <p:txBody>
+          <a:bodyPr wrap="square" rtlCol="0" anchor="t"/>
+          <a:lstStyle/>
+          <a:p>
+            <a:pPr algn="ctr" indent="0" marL="0">
+              <a:buNone/>
+            </a:pPr>
+            <a:r>
+              <a:rPr lang="en-US" sz="1800" b="1" dirty="0">
+                <a:solidFill>
+                  <a:srgbClr val="FFFFFF"/>
+                </a:solidFill>
+                <a:latin typeface="Consolas" pitchFamily="34" charset="0"/>
+                <a:ea typeface="Consolas" pitchFamily="34" charset="-122"/>
+                <a:cs typeface="Consolas" pitchFamily="34" charset="-120"/>
+              </a:rPr>
+              <a:t>Забыл библиотеку</a:t>
+            </a:r>
+            <a:endParaRPr lang="en-US" sz="1800" dirty="0"/>
+          </a:p>
+        </p:txBody>
+      </p:sp>
+      <p:sp>
+        <p:nvSpPr>
+          <p:cNvPr id="8" name="Text 6"/>
+          <p:cNvSpPr/>
+          <p:nvPr/>
+        </p:nvSpPr>
+        <p:spPr>
+          <a:xfrm>
+            <a:off x="777240" y="4114800"/>
+            <a:ext cx="2997098" cy="914400"/>
+          </a:xfrm>
+          <a:prstGeom prst="rect">
+            <a:avLst/>
+          </a:prstGeom>
+          <a:noFill/>
+          <a:ln/>
+        </p:spPr>
+        <p:txBody>
+          <a:bodyPr wrap="square" rtlCol="0" anchor="t"/>
+          <a:lstStyle/>
+          <a:p>
+            <a:pPr algn="ctr" indent="0" marL="0">
+              <a:lnSpc>
+                <a:spcPct val="115000"/>
+              </a:lnSpc>
+              <a:buNone/>
+            </a:pPr>
+            <a:r>
+              <a:rPr lang="en-US" sz="1500" dirty="0">
+                <a:solidFill>
+                  <a:srgbClr val="D9D4F2"/>
+                </a:solidFill>
+                <a:latin typeface="Calibri" pitchFamily="34" charset="0"/>
+                <a:ea typeface="Calibri" pitchFamily="34" charset="-122"/>
+                <a:cs typeface="Calibri" pitchFamily="34" charset="-120"/>
+              </a:rPr>
+              <a:t>в requirements.txt → сборка падает. Открой Logs.</a:t>
+            </a:r>
+            <a:endParaRPr lang="en-US" sz="1500" dirty="0"/>
+          </a:p>
+        </p:txBody>
+      </p:sp>
+      <p:sp>
+        <p:nvSpPr>
+          <p:cNvPr id="9" name="Shape 7"/>
+          <p:cNvSpPr/>
+          <p:nvPr/>
+        </p:nvSpPr>
+        <p:spPr>
+          <a:xfrm>
+            <a:off x="4414418" y="2194560"/>
+            <a:ext cx="3362858" cy="3108960"/>
+          </a:xfrm>
+          <a:prstGeom prst="roundRect">
+            <a:avLst>
+              <a:gd name="adj" fmla="val 3529"/>
+            </a:avLst>
+          </a:prstGeom>
+          <a:solidFill>
+            <a:srgbClr val="241E42"/>
+          </a:solidFill>
+          <a:ln/>
+        </p:spPr>
+      </p:sp>
+      <p:sp>
+        <p:nvSpPr>
+          <p:cNvPr id="10" name="Shape 8"/>
+          <p:cNvSpPr/>
+          <p:nvPr/>
+        </p:nvSpPr>
+        <p:spPr>
+          <a:xfrm>
+            <a:off x="5730088" y="2514600"/>
+            <a:ext cx="731520" cy="731520"/>
+          </a:xfrm>
+          <a:prstGeom prst="ellipse">
+            <a:avLst/>
+          </a:prstGeom>
+          <a:solidFill>
+            <a:srgbClr val="8B7DF5"/>
+          </a:solidFill>
+          <a:ln/>
+        </p:spPr>
+      </p:sp>
+      <p:sp>
+        <p:nvSpPr>
+          <p:cNvPr id="11" name="Text 9"/>
+          <p:cNvSpPr/>
+          <p:nvPr/>
+        </p:nvSpPr>
+        <p:spPr>
+          <a:xfrm>
+            <a:off x="5730088" y="2514600"/>
+            <a:ext cx="731520" cy="731520"/>
+          </a:xfrm>
+          <a:prstGeom prst="rect">
+            <a:avLst/>
+          </a:prstGeom>
+          <a:noFill/>
+          <a:ln/>
+        </p:spPr>
+        <p:txBody>
+          <a:bodyPr wrap="square" rtlCol="0" anchor="ctr"/>
+          <a:lstStyle/>
+          <a:p>
+            <a:pPr algn="ctr" indent="0" marL="0">
+              <a:buNone/>
+            </a:pPr>
+            <a:r>
+              <a:rPr lang="en-US" sz="2400" b="1" dirty="0">
+                <a:solidFill>
+                  <a:srgbClr val="FFFFFF"/>
+                </a:solidFill>
+                <a:latin typeface="Calibri" pitchFamily="34" charset="0"/>
+                <a:ea typeface="Calibri" pitchFamily="34" charset="-122"/>
+                <a:cs typeface="Calibri" pitchFamily="34" charset="-120"/>
+              </a:rPr>
+              <a:t>2</a:t>
+            </a:r>
+            <a:endParaRPr lang="en-US" sz="2400" dirty="0"/>
+          </a:p>
+        </p:txBody>
+      </p:sp>
+      <p:sp>
+        <p:nvSpPr>
+          <p:cNvPr id="12" name="Text 10"/>
+          <p:cNvSpPr/>
+          <p:nvPr/>
+        </p:nvSpPr>
+        <p:spPr>
+          <a:xfrm>
+            <a:off x="4551578" y="3474720"/>
+            <a:ext cx="3088538" cy="548640"/>
+          </a:xfrm>
+          <a:prstGeom prst="rect">
+            <a:avLst/>
+          </a:prstGeom>
+          <a:noFill/>
+          <a:ln/>
+        </p:spPr>
+        <p:txBody>
+          <a:bodyPr wrap="square" rtlCol="0" anchor="t"/>
+          <a:lstStyle/>
+          <a:p>
+            <a:pPr algn="ctr" indent="0" marL="0">
+              <a:buNone/>
+            </a:pPr>
+            <a:r>
+              <a:rPr lang="en-US" sz="1800" b="1" dirty="0">
+                <a:solidFill>
+                  <a:srgbClr val="FFFFFF"/>
+                </a:solidFill>
+                <a:latin typeface="Consolas" pitchFamily="34" charset="0"/>
+                <a:ea typeface="Consolas" pitchFamily="34" charset="-122"/>
+                <a:cs typeface="Consolas" pitchFamily="34" charset="-120"/>
+              </a:rPr>
+              <a:t>Оставил share=True</a:t>
+            </a:r>
+            <a:endParaRPr lang="en-US" sz="1800" dirty="0"/>
+          </a:p>
+        </p:txBody>
+      </p:sp>
+      <p:sp>
+        <p:nvSpPr>
+          <p:cNvPr id="13" name="Text 11"/>
+          <p:cNvSpPr/>
+          <p:nvPr/>
+        </p:nvSpPr>
+        <p:spPr>
+          <a:xfrm>
+            <a:off x="4597298" y="4114800"/>
+            <a:ext cx="2997098" cy="914400"/>
+          </a:xfrm>
+          <a:prstGeom prst="rect">
+            <a:avLst/>
+          </a:prstGeom>
+          <a:noFill/>
+          <a:ln/>
+        </p:spPr>
+        <p:txBody>
+          <a:bodyPr wrap="square" rtlCol="0" anchor="t"/>
+          <a:lstStyle/>
+          <a:p>
+            <a:pPr algn="ctr" indent="0" marL="0">
+              <a:lnSpc>
+                <a:spcPct val="115000"/>
+              </a:lnSpc>
+              <a:buNone/>
+            </a:pPr>
+            <a:r>
+              <a:rPr lang="en-US" sz="1500" dirty="0">
+                <a:solidFill>
+                  <a:srgbClr val="D9D4F2"/>
+                </a:solidFill>
+                <a:latin typeface="Calibri" pitchFamily="34" charset="0"/>
+                <a:ea typeface="Calibri" pitchFamily="34" charset="-122"/>
+                <a:cs typeface="Calibri" pitchFamily="34" charset="-120"/>
+              </a:rPr>
+              <a:t>в app.py — на Spaces он лишний.</a:t>
+            </a:r>
+            <a:endParaRPr lang="en-US" sz="1500" dirty="0"/>
+          </a:p>
+        </p:txBody>
+      </p:sp>
+      <p:sp>
+        <p:nvSpPr>
+          <p:cNvPr id="14" name="Shape 12"/>
+          <p:cNvSpPr/>
+          <p:nvPr/>
+        </p:nvSpPr>
+        <p:spPr>
+          <a:xfrm>
+            <a:off x="8234477" y="2194560"/>
+            <a:ext cx="3362858" cy="3108960"/>
+          </a:xfrm>
+          <a:prstGeom prst="roundRect">
+            <a:avLst>
+              <a:gd name="adj" fmla="val 3529"/>
+            </a:avLst>
+          </a:prstGeom>
+          <a:solidFill>
+            <a:srgbClr val="2C2552"/>
+          </a:solidFill>
+          <a:ln/>
+        </p:spPr>
+      </p:sp>
+      <p:sp>
+        <p:nvSpPr>
+          <p:cNvPr id="15" name="Shape 13"/>
+          <p:cNvSpPr/>
+          <p:nvPr/>
+        </p:nvSpPr>
+        <p:spPr>
+          <a:xfrm>
+            <a:off x="9550146" y="2514600"/>
+            <a:ext cx="731520" cy="731520"/>
+          </a:xfrm>
+          <a:prstGeom prst="ellipse">
+            <a:avLst/>
+          </a:prstGeom>
+          <a:solidFill>
+            <a:srgbClr val="27D3EE"/>
+          </a:solidFill>
+          <a:ln/>
+        </p:spPr>
+      </p:sp>
+      <p:sp>
+        <p:nvSpPr>
+          <p:cNvPr id="16" name="Text 14"/>
+          <p:cNvSpPr/>
+          <p:nvPr/>
+        </p:nvSpPr>
+        <p:spPr>
+          <a:xfrm>
+            <a:off x="9550146" y="2514600"/>
+            <a:ext cx="731520" cy="731520"/>
+          </a:xfrm>
+          <a:prstGeom prst="rect">
+            <a:avLst/>
+          </a:prstGeom>
+          <a:noFill/>
+          <a:ln/>
+        </p:spPr>
+        <p:txBody>
+          <a:bodyPr wrap="square" rtlCol="0" anchor="ctr"/>
+          <a:lstStyle/>
+          <a:p>
+            <a:pPr algn="ctr" indent="0" marL="0">
+              <a:buNone/>
+            </a:pPr>
+            <a:r>
+              <a:rPr lang="en-US" sz="2400" b="1" dirty="0">
+                <a:solidFill>
+                  <a:srgbClr val="17132E"/>
+                </a:solidFill>
+                <a:latin typeface="Calibri" pitchFamily="34" charset="0"/>
+                <a:ea typeface="Calibri" pitchFamily="34" charset="-122"/>
+                <a:cs typeface="Calibri" pitchFamily="34" charset="-120"/>
+              </a:rPr>
+              <a:t>3</a:t>
+            </a:r>
+            <a:endParaRPr lang="en-US" sz="2400" dirty="0"/>
+          </a:p>
+        </p:txBody>
+      </p:sp>
+      <p:sp>
+        <p:nvSpPr>
+          <p:cNvPr id="17" name="Text 15"/>
+          <p:cNvSpPr/>
+          <p:nvPr/>
+        </p:nvSpPr>
+        <p:spPr>
+          <a:xfrm>
+            <a:off x="8371637" y="3474720"/>
+            <a:ext cx="3088538" cy="548640"/>
+          </a:xfrm>
+          <a:prstGeom prst="rect">
+            <a:avLst/>
+          </a:prstGeom>
+          <a:noFill/>
+          <a:ln/>
+        </p:spPr>
+        <p:txBody>
+          <a:bodyPr wrap="square" rtlCol="0" anchor="t"/>
+          <a:lstStyle/>
+          <a:p>
+            <a:pPr algn="ctr" indent="0" marL="0">
+              <a:buNone/>
+            </a:pPr>
+            <a:r>
+              <a:rPr lang="en-US" sz="1800" b="1" dirty="0">
+                <a:solidFill>
+                  <a:srgbClr val="27D3EE"/>
+                </a:solidFill>
+                <a:latin typeface="Consolas" pitchFamily="34" charset="0"/>
+                <a:ea typeface="Consolas" pitchFamily="34" charset="-122"/>
+                <a:cs typeface="Consolas" pitchFamily="34" charset="-120"/>
+              </a:rPr>
+              <a:t>Загрузил не всё</a:t>
+            </a:r>
+            <a:endParaRPr lang="en-US" sz="1800" dirty="0"/>
+          </a:p>
+        </p:txBody>
+      </p:sp>
+      <p:sp>
+        <p:nvSpPr>
+          <p:cNvPr id="18" name="Text 16"/>
+          <p:cNvSpPr/>
+          <p:nvPr/>
+        </p:nvSpPr>
+        <p:spPr>
+          <a:xfrm>
+            <a:off x="8417357" y="4114800"/>
+            <a:ext cx="2997098" cy="914400"/>
+          </a:xfrm>
+          <a:prstGeom prst="rect">
+            <a:avLst/>
+          </a:prstGeom>
+          <a:noFill/>
+          <a:ln/>
+        </p:spPr>
+        <p:txBody>
+          <a:bodyPr wrap="square" rtlCol="0" anchor="t"/>
+          <a:lstStyle/>
+          <a:p>
+            <a:pPr algn="ctr" indent="0" marL="0">
+              <a:lnSpc>
+                <a:spcPct val="115000"/>
+              </a:lnSpc>
+              <a:buNone/>
+            </a:pPr>
+            <a:r>
+              <a:rPr lang="en-US" sz="1500" dirty="0">
+                <a:solidFill>
+                  <a:srgbClr val="D9D4F2"/>
+                </a:solidFill>
+                <a:latin typeface="Calibri" pitchFamily="34" charset="0"/>
+                <a:ea typeface="Calibri" pitchFamily="34" charset="-122"/>
+                <a:cs typeface="Calibri" pitchFamily="34" charset="-120"/>
+              </a:rPr>
+              <a:t>забыл penguin_model.joblib рядом с кодом.</a:t>
+            </a:r>
+            <a:endParaRPr lang="en-US" sz="1500" dirty="0"/>
+          </a:p>
+        </p:txBody>
+      </p:sp>
+      <p:sp>
+        <p:nvSpPr>
+          <p:cNvPr id="19" name="Text 17"/>
+          <p:cNvSpPr/>
+          <p:nvPr/>
+        </p:nvSpPr>
+        <p:spPr>
+          <a:xfrm>
+            <a:off x="594360" y="5577840"/>
+            <a:ext cx="11002975" cy="457200"/>
+          </a:xfrm>
+          <a:prstGeom prst="rect">
+            <a:avLst/>
+          </a:prstGeom>
+          <a:noFill/>
+          <a:ln/>
+        </p:spPr>
+        <p:txBody>
+          <a:bodyPr wrap="square" rtlCol="0" anchor="t"/>
+          <a:lstStyle/>
+          <a:p>
+            <a:pPr algn="ctr" indent="0" marL="0">
+              <a:buNone/>
+            </a:pPr>
+            <a:r>
+              <a:rPr lang="en-US" sz="1600" i="1" dirty="0">
+                <a:solidFill>
+                  <a:srgbClr val="2DD4BF"/>
+                </a:solidFill>
+                <a:latin typeface="Calibri" pitchFamily="34" charset="0"/>
+                <a:ea typeface="Calibri" pitchFamily="34" charset="-122"/>
+                <a:cs typeface="Calibri" pitchFamily="34" charset="-120"/>
+              </a:rPr>
+              <a:t>❓ Спроси класс: что будет, если забыть requirements.txt? → библиотека не установится, сборка упадёт.</a:t>
+            </a:r>
+            <a:endParaRPr lang="en-US" sz="1600" dirty="0"/>
+          </a:p>
+        </p:txBody>
+      </p:sp>
+      <p:sp>
+        <p:nvSpPr>
+          <p:cNvPr id="20" name="Text 18"/>
           <p:cNvSpPr/>
           <p:nvPr/>
         </p:nvSpPr>
